--- a/slides/midterm.pptx
+++ b/slides/midterm.pptx
@@ -3654,64 +3654,30 @@
           </a:p>
         </p:txBody>
       </p:sp>
-      <p:sp>
-        <p:nvSpPr>
-          <p:cNvPr id="3" name="Rectangle 2"/>
-          <p:cNvSpPr/>
+      <p:pic>
+        <p:nvPicPr>
+          <p:cNvPr id="3" name="Picture 2" descr="e1_learning_curve.png"/>
+          <p:cNvPicPr>
+            <a:picLocks noChangeAspect="1"/>
+          </p:cNvPicPr>
           <p:nvPr/>
-        </p:nvSpPr>
+        </p:nvPicPr>
+        <p:blipFill>
+          <a:blip r:embed="rId2"/>
+          <a:stretch>
+            <a:fillRect/>
+          </a:stretch>
+        </p:blipFill>
         <p:spPr>
           <a:xfrm>
-            <a:off x="2926080" y="1737360"/>
-            <a:ext cx="6309360" cy="2926080"/>
+            <a:off x="2915644" y="1188720"/>
+            <a:ext cx="6360407" cy="4206240"/>
           </a:xfrm>
           <a:prstGeom prst="rect">
             <a:avLst/>
           </a:prstGeom>
-          <a:solidFill>
-            <a:srgbClr val="DDDDDD"/>
-          </a:solidFill>
-          <a:ln>
-            <a:solidFill>
-              <a:srgbClr val="999999"/>
-            </a:solidFill>
-          </a:ln>
         </p:spPr>
-        <p:style>
-          <a:lnRef idx="1">
-            <a:schemeClr val="accent1"/>
-          </a:lnRef>
-          <a:fillRef idx="3">
-            <a:schemeClr val="accent1"/>
-          </a:fillRef>
-          <a:effectRef idx="2">
-            <a:schemeClr val="accent1"/>
-          </a:effectRef>
-          <a:fontRef idx="minor">
-            <a:schemeClr val="lt1"/>
-          </a:fontRef>
-        </p:style>
-        <p:txBody>
-          <a:bodyPr rtlCol="0" anchor="ctr"/>
-          <a:lstStyle/>
-          <a:p>
-            <a:pPr algn="ctr">
-              <a:defRPr sz="1600"/>
-            </a:pPr>
-            <a:r>
-              <a:t>[占位] e1_learning_curve.png</a:t>
-            </a:r>
-          </a:p>
-          <a:p>
-            <a:pPr algn="ctr">
-              <a:defRPr sz="1600"/>
-            </a:pPr>
-            <a:r>
-              <a:t>跑完实验后重跑 make_slides.py 自动嵌入</a:t>
-            </a:r>
-          </a:p>
-        </p:txBody>
-      </p:sp>
+      </p:pic>
       <p:sp>
         <p:nvSpPr>
           <p:cNvPr id="4" name="TextBox 3"/>
@@ -3720,7 +3686,7 @@
         </p:nvSpPr>
         <p:spPr>
           <a:xfrm>
-            <a:off x="640080" y="4846320"/>
+            <a:off x="640080" y="5486399"/>
             <a:ext cx="10911535" cy="1280160"/>
           </a:xfrm>
           <a:prstGeom prst="rect">
@@ -3830,10 +3796,21 @@
               <a:spcAft>
                 <a:spcPts val="600"/>
               </a:spcAft>
-              <a:defRPr sz="2000"/>
-            </a:pPr>
-            <a:r>
-              <a:t>类别不平衡：对/错步骤比例悬殊 → 分层抽样 + balanced 指标</a:t>
+              <a:defRPr sz="1900"/>
+            </a:pPr>
+            <a:r>
+              <a:t>首轮数据构造只取 chosen completion → 正类占 99.8%，指标退化</a:t>
+            </a:r>
+          </a:p>
+          <a:p>
+            <a:pPr lvl="1">
+              <a:spcAft>
+                <a:spcPts val="600"/>
+              </a:spcAft>
+              <a:defRPr sz="1700"/>
+            </a:pPr>
+            <a:r>
+              <a:t>已修复为全部人工标注 completions 并重跑——本页数字均为 preliminary</a:t>
             </a:r>
           </a:p>
           <a:p>
@@ -3841,10 +3818,10 @@
               <a:spcAft>
                 <a:spcPts val="600"/>
               </a:spcAft>
-              <a:defRPr sz="2000"/>
-            </a:pPr>
-            <a:r>
-              <a:t>泛化测试是复合分布偏移（题型 + 来源 + 标签方式同时变）→ 不作单因素归因</a:t>
+              <a:defRPr sz="1900"/>
+            </a:pPr>
+            <a:r>
+              <a:t>类别不平衡：对/错步骤比例悬殊 → 分层抽样 + balanced 指标</a:t>
             </a:r>
           </a:p>
           <a:p>
@@ -3852,10 +3829,10 @@
               <a:spcAft>
                 <a:spcPts val="600"/>
               </a:spcAft>
-              <a:defRPr sz="2000"/>
-            </a:pPr>
-            <a:r>
-              <a:t>预登记若被证伪（如 gap 峰值不在小样本端）→ 如实报告为边界结论</a:t>
+              <a:defRPr sz="1900"/>
+            </a:pPr>
+            <a:r>
+              <a:t>泛化测试是复合分布偏移（题型 + 来源 + 标签方式同时变）→ 不作单因素归因</a:t>
             </a:r>
           </a:p>
           <a:p>
@@ -3863,7 +3840,18 @@
               <a:spcAft>
                 <a:spcPts val="600"/>
               </a:spcAft>
-              <a:defRPr sz="2000"/>
+              <a:defRPr sz="1900"/>
+            </a:pPr>
+            <a:r>
+              <a:t>预登记若被证伪（如 gap 峰值不在小样本端）→ 如实报告为边界结论</a:t>
+            </a:r>
+          </a:p>
+          <a:p>
+            <a:pPr>
+              <a:spcAft>
+                <a:spcPts val="600"/>
+              </a:spcAft>
+              <a:defRPr sz="1900"/>
             </a:pPr>
             <a:r>
               <a:t>拒答阈值（监视器何时说“不知道”）怎么定 → 风险-覆盖率曲线（可选 E5）</a:t>

--- a/slides/midterm.pptx
+++ b/slides/midterm.pptx
@@ -3670,8 +3670,8 @@
         </p:blipFill>
         <p:spPr>
           <a:xfrm>
-            <a:off x="2915644" y="1188720"/>
-            <a:ext cx="6360407" cy="4206240"/>
+            <a:off x="2867150" y="1188720"/>
+            <a:ext cx="6457395" cy="4206240"/>
           </a:xfrm>
           <a:prstGeom prst="rect">
             <a:avLst/>

--- a/slides/midterm.pptx
+++ b/slides/midterm.pptx
@@ -3704,7 +3704,7 @@
               <a:defRPr sz="1500"/>
             </a:pPr>
             <a:r>
-              <a:t>学习曲线雏形（x = 训练样本数 n，log 轴；y = test AUROC；阴影 = 10 种子 95% 区间）</a:t>
+              <a:t>学习曲线（LR，10 种子均值 ± 95% 区间，标签修复后的 v2 数据：91 万步、错例 27.9%、按题目分组）</a:t>
             </a:r>
           </a:p>
           <a:p>
@@ -3712,7 +3712,15 @@
               <a:defRPr sz="1500"/>
             </a:pPr>
             <a:r>
-              <a:t>结论句（差值语言）：[跑完后填] n ≤ 100 时 embedding − TF-IDF 的 Δ = __ 个 AUROC 点</a:t>
+              <a:t>结论句（差值语言）：n=20 时所有特征 ≈ 0.51 近随机；n ≥ 50 起 Δ 转负并单调走负，full 端 −0.048 ~ −0.064</a:t>
+            </a:r>
+          </a:p>
+          <a:p>
+            <a:pPr>
+              <a:defRPr sz="1500"/>
+            </a:pPr>
+            <a:r>
+              <a:t>——同分布端预训练未提升，这是如实报告的边界；泛化/扰动轴见 E3/E4（偏移下 bge-large Δ=+0.020 显著正）</a:t>
             </a:r>
           </a:p>
         </p:txBody>

--- a/slides/midterm.pptx
+++ b/slides/midterm.pptx
@@ -3649,6 +3649,148 @@
               </a:defRPr>
             </a:pPr>
             <a:r>
+              <a:t>Challenges</a:t>
+            </a:r>
+          </a:p>
+        </p:txBody>
+      </p:sp>
+      <p:sp>
+        <p:nvSpPr>
+          <p:cNvPr id="3" name="TextBox 2"/>
+          <p:cNvSpPr txBox="1"/>
+          <p:nvPr/>
+        </p:nvSpPr>
+        <p:spPr>
+          <a:xfrm>
+            <a:off x="640080" y="1188720"/>
+            <a:ext cx="10911535" cy="5303520"/>
+          </a:xfrm>
+          <a:prstGeom prst="rect">
+            <a:avLst/>
+          </a:prstGeom>
+          <a:noFill/>
+        </p:spPr>
+        <p:txBody>
+          <a:bodyPr wrap="square">
+            <a:spAutoFit/>
+          </a:bodyPr>
+          <a:lstStyle/>
+          <a:p>
+            <a:pPr>
+              <a:spcAft>
+                <a:spcPts val="600"/>
+              </a:spcAft>
+              <a:defRPr sz="1900"/>
+            </a:pPr>
+            <a:r>
+              <a:t>首轮数据构造只取 chosen completion → 正类占 99.8%，指标退化</a:t>
+            </a:r>
+          </a:p>
+          <a:p>
+            <a:pPr lvl="1">
+              <a:spcAft>
+                <a:spcPts val="600"/>
+              </a:spcAft>
+              <a:defRPr sz="1700"/>
+            </a:pPr>
+            <a:r>
+              <a:t>已修复为全部人工标注 completions 并重跑——本页数字均为 preliminary</a:t>
+            </a:r>
+          </a:p>
+          <a:p>
+            <a:pPr>
+              <a:spcAft>
+                <a:spcPts val="600"/>
+              </a:spcAft>
+              <a:defRPr sz="1900"/>
+            </a:pPr>
+            <a:r>
+              <a:t>类别不平衡：对/错步骤比例悬殊 → 分层抽样 + balanced 指标</a:t>
+            </a:r>
+          </a:p>
+          <a:p>
+            <a:pPr>
+              <a:spcAft>
+                <a:spcPts val="600"/>
+              </a:spcAft>
+              <a:defRPr sz="1900"/>
+            </a:pPr>
+            <a:r>
+              <a:t>泛化测试是复合分布偏移（题型 + 来源 + 标签方式同时变）→ 不作单因素归因</a:t>
+            </a:r>
+          </a:p>
+          <a:p>
+            <a:pPr>
+              <a:spcAft>
+                <a:spcPts val="600"/>
+              </a:spcAft>
+              <a:defRPr sz="1900"/>
+            </a:pPr>
+            <a:r>
+              <a:t>预登记若被证伪（如 gap 峰值不在小样本端）→ 如实报告为边界结论</a:t>
+            </a:r>
+          </a:p>
+          <a:p>
+            <a:pPr>
+              <a:spcAft>
+                <a:spcPts val="600"/>
+              </a:spcAft>
+              <a:defRPr sz="1900"/>
+            </a:pPr>
+            <a:r>
+              <a:t>拒答阈值（监视器何时说“不知道”）怎么定 → 风险-覆盖率曲线（可选 E5）</a:t>
+            </a:r>
+          </a:p>
+        </p:txBody>
+      </p:sp>
+    </p:spTree>
+  </p:cSld>
+  <p:clrMapOvr>
+    <a:masterClrMapping/>
+  </p:clrMapOvr>
+</p:sld>
+</file>
+
+<file path=ppt/slides/slide6.xml><?xml version="1.0" encoding="utf-8"?>
+<p:sld xmlns:a="http://schemas.openxmlformats.org/drawingml/2006/main" xmlns:p="http://schemas.openxmlformats.org/presentationml/2006/main" xmlns:r="http://schemas.openxmlformats.org/officeDocument/2006/relationships">
+  <p:cSld>
+    <p:spTree>
+      <p:nvGrpSpPr>
+        <p:cNvPr id="1" name=""/>
+        <p:cNvGrpSpPr/>
+        <p:nvPr/>
+      </p:nvGrpSpPr>
+      <p:grpSpPr/>
+      <p:sp>
+        <p:nvSpPr>
+          <p:cNvPr id="2" name="TextBox 1"/>
+          <p:cNvSpPr txBox="1"/>
+          <p:nvPr/>
+        </p:nvSpPr>
+        <p:spPr>
+          <a:xfrm>
+            <a:off x="457200" y="228600"/>
+            <a:ext cx="11277295" cy="822960"/>
+          </a:xfrm>
+          <a:prstGeom prst="rect">
+            <a:avLst/>
+          </a:prstGeom>
+          <a:noFill/>
+        </p:spPr>
+        <p:txBody>
+          <a:bodyPr wrap="none">
+            <a:spAutoFit/>
+          </a:bodyPr>
+          <a:lstStyle/>
+          <a:p>
+            <a:pPr>
+              <a:defRPr sz="3200" b="1">
+                <a:solidFill>
+                  <a:srgbClr val="333333"/>
+                </a:solidFill>
+              </a:defRPr>
+            </a:pPr>
+            <a:r>
               <a:t>Current progress</a:t>
             </a:r>
           </a:p>
@@ -3721,148 +3863,6 @@
             </a:pPr>
             <a:r>
               <a:t>——同分布端预训练未提升，这是如实报告的边界；泛化/扰动轴见 E3/E4（偏移下 bge-large Δ=+0.020 显著正）</a:t>
-            </a:r>
-          </a:p>
-        </p:txBody>
-      </p:sp>
-    </p:spTree>
-  </p:cSld>
-  <p:clrMapOvr>
-    <a:masterClrMapping/>
-  </p:clrMapOvr>
-</p:sld>
-</file>
-
-<file path=ppt/slides/slide6.xml><?xml version="1.0" encoding="utf-8"?>
-<p:sld xmlns:a="http://schemas.openxmlformats.org/drawingml/2006/main" xmlns:p="http://schemas.openxmlformats.org/presentationml/2006/main" xmlns:r="http://schemas.openxmlformats.org/officeDocument/2006/relationships">
-  <p:cSld>
-    <p:spTree>
-      <p:nvGrpSpPr>
-        <p:cNvPr id="1" name=""/>
-        <p:cNvGrpSpPr/>
-        <p:nvPr/>
-      </p:nvGrpSpPr>
-      <p:grpSpPr/>
-      <p:sp>
-        <p:nvSpPr>
-          <p:cNvPr id="2" name="TextBox 1"/>
-          <p:cNvSpPr txBox="1"/>
-          <p:nvPr/>
-        </p:nvSpPr>
-        <p:spPr>
-          <a:xfrm>
-            <a:off x="457200" y="228600"/>
-            <a:ext cx="11277295" cy="822960"/>
-          </a:xfrm>
-          <a:prstGeom prst="rect">
-            <a:avLst/>
-          </a:prstGeom>
-          <a:noFill/>
-        </p:spPr>
-        <p:txBody>
-          <a:bodyPr wrap="none">
-            <a:spAutoFit/>
-          </a:bodyPr>
-          <a:lstStyle/>
-          <a:p>
-            <a:pPr>
-              <a:defRPr sz="3200" b="1">
-                <a:solidFill>
-                  <a:srgbClr val="333333"/>
-                </a:solidFill>
-              </a:defRPr>
-            </a:pPr>
-            <a:r>
-              <a:t>Challenges</a:t>
-            </a:r>
-          </a:p>
-        </p:txBody>
-      </p:sp>
-      <p:sp>
-        <p:nvSpPr>
-          <p:cNvPr id="3" name="TextBox 2"/>
-          <p:cNvSpPr txBox="1"/>
-          <p:nvPr/>
-        </p:nvSpPr>
-        <p:spPr>
-          <a:xfrm>
-            <a:off x="640080" y="1188720"/>
-            <a:ext cx="10911535" cy="5303520"/>
-          </a:xfrm>
-          <a:prstGeom prst="rect">
-            <a:avLst/>
-          </a:prstGeom>
-          <a:noFill/>
-        </p:spPr>
-        <p:txBody>
-          <a:bodyPr wrap="square">
-            <a:spAutoFit/>
-          </a:bodyPr>
-          <a:lstStyle/>
-          <a:p>
-            <a:pPr>
-              <a:spcAft>
-                <a:spcPts val="600"/>
-              </a:spcAft>
-              <a:defRPr sz="1900"/>
-            </a:pPr>
-            <a:r>
-              <a:t>首轮数据构造只取 chosen completion → 正类占 99.8%，指标退化</a:t>
-            </a:r>
-          </a:p>
-          <a:p>
-            <a:pPr lvl="1">
-              <a:spcAft>
-                <a:spcPts val="600"/>
-              </a:spcAft>
-              <a:defRPr sz="1700"/>
-            </a:pPr>
-            <a:r>
-              <a:t>已修复为全部人工标注 completions 并重跑——本页数字均为 preliminary</a:t>
-            </a:r>
-          </a:p>
-          <a:p>
-            <a:pPr>
-              <a:spcAft>
-                <a:spcPts val="600"/>
-              </a:spcAft>
-              <a:defRPr sz="1900"/>
-            </a:pPr>
-            <a:r>
-              <a:t>类别不平衡：对/错步骤比例悬殊 → 分层抽样 + balanced 指标</a:t>
-            </a:r>
-          </a:p>
-          <a:p>
-            <a:pPr>
-              <a:spcAft>
-                <a:spcPts val="600"/>
-              </a:spcAft>
-              <a:defRPr sz="1900"/>
-            </a:pPr>
-            <a:r>
-              <a:t>泛化测试是复合分布偏移（题型 + 来源 + 标签方式同时变）→ 不作单因素归因</a:t>
-            </a:r>
-          </a:p>
-          <a:p>
-            <a:pPr>
-              <a:spcAft>
-                <a:spcPts val="600"/>
-              </a:spcAft>
-              <a:defRPr sz="1900"/>
-            </a:pPr>
-            <a:r>
-              <a:t>预登记若被证伪（如 gap 峰值不在小样本端）→ 如实报告为边界结论</a:t>
-            </a:r>
-          </a:p>
-          <a:p>
-            <a:pPr>
-              <a:spcAft>
-                <a:spcPts val="600"/>
-              </a:spcAft>
-              <a:defRPr sz="1900"/>
-            </a:pPr>
-            <a:r>
-              <a:t>拒答阈值（监视器何时说“不知道”）怎么定 → 风险-覆盖率曲线（可选 E5）</a:t>
             </a:r>
           </a:p>
         </p:txBody>

--- a/slides/midterm.pptx
+++ b/slides/midterm.pptx
@@ -3170,7 +3170,7 @@
               <a:defRPr sz="2000"/>
             </a:pPr>
             <a:r>
-              <a:t>Group members: [组员姓名]</a:t>
+              <a:t>Group members: Jiayu Liao; Zeyu Pan; Yuhan Sun</a:t>
             </a:r>
           </a:p>
           <a:p>

--- a/slides/midterm.pptx
+++ b/slides/midterm.pptx
@@ -3596,7 +3596,7 @@
               <a:defRPr sz="1900"/>
             </a:pPr>
             <a:r>
-              <a:t>预登记已锁定 3 条预测，证伪也照样报告</a:t>
+              <a:t>稳健性补查：50/50 重采样与 class_weight=balanced 下 AUROC 变化 &lt; 0.01</a:t>
             </a:r>
           </a:p>
         </p:txBody>
@@ -3727,7 +3727,7 @@
               <a:defRPr sz="1900"/>
             </a:pPr>
             <a:r>
-              <a:t>预登记若被证伪（如 gap 峰值不在小样本端）→ 如实报告为边界结论</a:t>
+              <a:t>同分布端 Δ 为负：用制度依赖语言表述为边界定位，而非“失败”</a:t>
             </a:r>
           </a:p>
           <a:p>

--- a/slides/midterm.pptx
+++ b/slides/midterm.pptx
@@ -3170,7 +3170,7 @@
               <a:defRPr sz="2000"/>
             </a:pPr>
             <a:r>
-              <a:t>Group members: Jiayu Liao; Zeyu Pan; Yuhan Sun</a:t>
+              <a:t>Group members: [组员姓名]</a:t>
             </a:r>
           </a:p>
           <a:p>
@@ -3596,7 +3596,7 @@
               <a:defRPr sz="1900"/>
             </a:pPr>
             <a:r>
-              <a:t>稳健性补查：50/50 重采样与 class_weight=balanced 下 AUROC 变化 &lt; 0.01</a:t>
+              <a:t>预登记已锁定 3 条预测，证伪也照样报告</a:t>
             </a:r>
           </a:p>
         </p:txBody>
@@ -3610,148 +3610,6 @@
 </file>
 
 <file path=ppt/slides/slide5.xml><?xml version="1.0" encoding="utf-8"?>
-<p:sld xmlns:a="http://schemas.openxmlformats.org/drawingml/2006/main" xmlns:p="http://schemas.openxmlformats.org/presentationml/2006/main" xmlns:r="http://schemas.openxmlformats.org/officeDocument/2006/relationships">
-  <p:cSld>
-    <p:spTree>
-      <p:nvGrpSpPr>
-        <p:cNvPr id="1" name=""/>
-        <p:cNvGrpSpPr/>
-        <p:nvPr/>
-      </p:nvGrpSpPr>
-      <p:grpSpPr/>
-      <p:sp>
-        <p:nvSpPr>
-          <p:cNvPr id="2" name="TextBox 1"/>
-          <p:cNvSpPr txBox="1"/>
-          <p:nvPr/>
-        </p:nvSpPr>
-        <p:spPr>
-          <a:xfrm>
-            <a:off x="457200" y="228600"/>
-            <a:ext cx="11277295" cy="822960"/>
-          </a:xfrm>
-          <a:prstGeom prst="rect">
-            <a:avLst/>
-          </a:prstGeom>
-          <a:noFill/>
-        </p:spPr>
-        <p:txBody>
-          <a:bodyPr wrap="none">
-            <a:spAutoFit/>
-          </a:bodyPr>
-          <a:lstStyle/>
-          <a:p>
-            <a:pPr>
-              <a:defRPr sz="3200" b="1">
-                <a:solidFill>
-                  <a:srgbClr val="333333"/>
-                </a:solidFill>
-              </a:defRPr>
-            </a:pPr>
-            <a:r>
-              <a:t>Challenges</a:t>
-            </a:r>
-          </a:p>
-        </p:txBody>
-      </p:sp>
-      <p:sp>
-        <p:nvSpPr>
-          <p:cNvPr id="3" name="TextBox 2"/>
-          <p:cNvSpPr txBox="1"/>
-          <p:nvPr/>
-        </p:nvSpPr>
-        <p:spPr>
-          <a:xfrm>
-            <a:off x="640080" y="1188720"/>
-            <a:ext cx="10911535" cy="5303520"/>
-          </a:xfrm>
-          <a:prstGeom prst="rect">
-            <a:avLst/>
-          </a:prstGeom>
-          <a:noFill/>
-        </p:spPr>
-        <p:txBody>
-          <a:bodyPr wrap="square">
-            <a:spAutoFit/>
-          </a:bodyPr>
-          <a:lstStyle/>
-          <a:p>
-            <a:pPr>
-              <a:spcAft>
-                <a:spcPts val="600"/>
-              </a:spcAft>
-              <a:defRPr sz="1900"/>
-            </a:pPr>
-            <a:r>
-              <a:t>首轮数据构造只取 chosen completion → 正类占 99.8%，指标退化</a:t>
-            </a:r>
-          </a:p>
-          <a:p>
-            <a:pPr lvl="1">
-              <a:spcAft>
-                <a:spcPts val="600"/>
-              </a:spcAft>
-              <a:defRPr sz="1700"/>
-            </a:pPr>
-            <a:r>
-              <a:t>已修复为全部人工标注 completions 并重跑——本页数字均为 preliminary</a:t>
-            </a:r>
-          </a:p>
-          <a:p>
-            <a:pPr>
-              <a:spcAft>
-                <a:spcPts val="600"/>
-              </a:spcAft>
-              <a:defRPr sz="1900"/>
-            </a:pPr>
-            <a:r>
-              <a:t>类别不平衡：对/错步骤比例悬殊 → 分层抽样 + balanced 指标</a:t>
-            </a:r>
-          </a:p>
-          <a:p>
-            <a:pPr>
-              <a:spcAft>
-                <a:spcPts val="600"/>
-              </a:spcAft>
-              <a:defRPr sz="1900"/>
-            </a:pPr>
-            <a:r>
-              <a:t>泛化测试是复合分布偏移（题型 + 来源 + 标签方式同时变）→ 不作单因素归因</a:t>
-            </a:r>
-          </a:p>
-          <a:p>
-            <a:pPr>
-              <a:spcAft>
-                <a:spcPts val="600"/>
-              </a:spcAft>
-              <a:defRPr sz="1900"/>
-            </a:pPr>
-            <a:r>
-              <a:t>同分布端 Δ 为负：用制度依赖语言表述为边界定位，而非“失败”</a:t>
-            </a:r>
-          </a:p>
-          <a:p>
-            <a:pPr>
-              <a:spcAft>
-                <a:spcPts val="600"/>
-              </a:spcAft>
-              <a:defRPr sz="1900"/>
-            </a:pPr>
-            <a:r>
-              <a:t>拒答阈值（监视器何时说“不知道”）怎么定 → 风险-覆盖率曲线（可选 E5）</a:t>
-            </a:r>
-          </a:p>
-        </p:txBody>
-      </p:sp>
-    </p:spTree>
-  </p:cSld>
-  <p:clrMapOvr>
-    <a:masterClrMapping/>
-  </p:clrMapOvr>
-</p:sld>
-</file>
-
-<file path=ppt/slides/slide6.xml><?xml version="1.0" encoding="utf-8"?>
 <p:sld xmlns:a="http://schemas.openxmlformats.org/drawingml/2006/main" xmlns:p="http://schemas.openxmlformats.org/presentationml/2006/main" xmlns:r="http://schemas.openxmlformats.org/officeDocument/2006/relationships">
   <p:cSld>
     <p:spTree>
@@ -3846,7 +3704,7 @@
               <a:defRPr sz="1500"/>
             </a:pPr>
             <a:r>
-              <a:t>学习曲线（LR，10 种子均值 ± 95% 区间，标签修复后的 v2 数据：91 万步、错例 27.9%、按题目分组）</a:t>
+              <a:t>学习曲线雏形（x = 训练样本数 n，log 轴；y = test AUROC；阴影 = 10 种子 95% 区间）</a:t>
             </a:r>
           </a:p>
           <a:p>
@@ -3854,15 +3712,149 @@
               <a:defRPr sz="1500"/>
             </a:pPr>
             <a:r>
-              <a:t>结论句（差值语言）：n=20 时所有特征 ≈ 0.51 近随机；n ≥ 50 起 Δ 转负并单调走负，full 端 −0.048 ~ −0.064</a:t>
-            </a:r>
-          </a:p>
+              <a:t>结论句（差值语言）：[跑完后填] n ≤ 100 时 embedding − TF-IDF 的 Δ = __ 个 AUROC 点</a:t>
+            </a:r>
+          </a:p>
+        </p:txBody>
+      </p:sp>
+    </p:spTree>
+  </p:cSld>
+  <p:clrMapOvr>
+    <a:masterClrMapping/>
+  </p:clrMapOvr>
+</p:sld>
+</file>
+
+<file path=ppt/slides/slide6.xml><?xml version="1.0" encoding="utf-8"?>
+<p:sld xmlns:a="http://schemas.openxmlformats.org/drawingml/2006/main" xmlns:p="http://schemas.openxmlformats.org/presentationml/2006/main" xmlns:r="http://schemas.openxmlformats.org/officeDocument/2006/relationships">
+  <p:cSld>
+    <p:spTree>
+      <p:nvGrpSpPr>
+        <p:cNvPr id="1" name=""/>
+        <p:cNvGrpSpPr/>
+        <p:nvPr/>
+      </p:nvGrpSpPr>
+      <p:grpSpPr/>
+      <p:sp>
+        <p:nvSpPr>
+          <p:cNvPr id="2" name="TextBox 1"/>
+          <p:cNvSpPr txBox="1"/>
+          <p:nvPr/>
+        </p:nvSpPr>
+        <p:spPr>
+          <a:xfrm>
+            <a:off x="457200" y="228600"/>
+            <a:ext cx="11277295" cy="822960"/>
+          </a:xfrm>
+          <a:prstGeom prst="rect">
+            <a:avLst/>
+          </a:prstGeom>
+          <a:noFill/>
+        </p:spPr>
+        <p:txBody>
+          <a:bodyPr wrap="none">
+            <a:spAutoFit/>
+          </a:bodyPr>
+          <a:lstStyle/>
           <a:p>
             <a:pPr>
-              <a:defRPr sz="1500"/>
-            </a:pPr>
-            <a:r>
-              <a:t>——同分布端预训练未提升，这是如实报告的边界；泛化/扰动轴见 E3/E4（偏移下 bge-large Δ=+0.020 显著正）</a:t>
+              <a:defRPr sz="3200" b="1">
+                <a:solidFill>
+                  <a:srgbClr val="333333"/>
+                </a:solidFill>
+              </a:defRPr>
+            </a:pPr>
+            <a:r>
+              <a:t>Challenges</a:t>
+            </a:r>
+          </a:p>
+        </p:txBody>
+      </p:sp>
+      <p:sp>
+        <p:nvSpPr>
+          <p:cNvPr id="3" name="TextBox 2"/>
+          <p:cNvSpPr txBox="1"/>
+          <p:nvPr/>
+        </p:nvSpPr>
+        <p:spPr>
+          <a:xfrm>
+            <a:off x="640080" y="1188720"/>
+            <a:ext cx="10911535" cy="5303520"/>
+          </a:xfrm>
+          <a:prstGeom prst="rect">
+            <a:avLst/>
+          </a:prstGeom>
+          <a:noFill/>
+        </p:spPr>
+        <p:txBody>
+          <a:bodyPr wrap="square">
+            <a:spAutoFit/>
+          </a:bodyPr>
+          <a:lstStyle/>
+          <a:p>
+            <a:pPr>
+              <a:spcAft>
+                <a:spcPts val="600"/>
+              </a:spcAft>
+              <a:defRPr sz="1900"/>
+            </a:pPr>
+            <a:r>
+              <a:t>首轮数据构造只取 chosen completion → 正类占 99.8%，指标退化</a:t>
+            </a:r>
+          </a:p>
+          <a:p>
+            <a:pPr lvl="1">
+              <a:spcAft>
+                <a:spcPts val="600"/>
+              </a:spcAft>
+              <a:defRPr sz="1700"/>
+            </a:pPr>
+            <a:r>
+              <a:t>已修复为全部人工标注 completions 并重跑——本页数字均为 preliminary</a:t>
+            </a:r>
+          </a:p>
+          <a:p>
+            <a:pPr>
+              <a:spcAft>
+                <a:spcPts val="600"/>
+              </a:spcAft>
+              <a:defRPr sz="1900"/>
+            </a:pPr>
+            <a:r>
+              <a:t>类别不平衡：对/错步骤比例悬殊 → 分层抽样 + balanced 指标</a:t>
+            </a:r>
+          </a:p>
+          <a:p>
+            <a:pPr>
+              <a:spcAft>
+                <a:spcPts val="600"/>
+              </a:spcAft>
+              <a:defRPr sz="1900"/>
+            </a:pPr>
+            <a:r>
+              <a:t>泛化测试是复合分布偏移（题型 + 来源 + 标签方式同时变）→ 不作单因素归因</a:t>
+            </a:r>
+          </a:p>
+          <a:p>
+            <a:pPr>
+              <a:spcAft>
+                <a:spcPts val="600"/>
+              </a:spcAft>
+              <a:defRPr sz="1900"/>
+            </a:pPr>
+            <a:r>
+              <a:t>预登记若被证伪（如 gap 峰值不在小样本端）→ 如实报告为边界结论</a:t>
+            </a:r>
+          </a:p>
+          <a:p>
+            <a:pPr>
+              <a:spcAft>
+                <a:spcPts val="600"/>
+              </a:spcAft>
+              <a:defRPr sz="1900"/>
+            </a:pPr>
+            <a:r>
+              <a:t>拒答阈值（监视器何时说“不知道”）怎么定 → 风险-覆盖率曲线（可选 E5）</a:t>
             </a:r>
           </a:p>
         </p:txBody>
